--- a/samples/hanbit/documents/영업전략회의록.pptx
+++ b/samples/hanbit/documents/영업전략회의록.pptx
@@ -3476,6 +3476,17 @@
               <a:t>• 영업3팀은 호남·충청 지역 도소매 고객의 주문 건수가 줄어 하반기 회복 계획을 세우기로 하였다</a:t>
             </a:r>
           </a:p>
+          <a:p>
+            <a:pPr>
+              <a:spcAft>
+                <a:spcPts val="800"/>
+              </a:spcAft>
+              <a:defRPr sz="1500"/>
+            </a:pPr>
+            <a:r>
+              <a:t>• 영업1팀장은 수도권 신규 고객의 첫 주문 금액이 작아 주문당 출고 비용이 커지고 있다고 보고하였다</a:t>
+            </a:r>
+          </a:p>
         </p:txBody>
       </p:sp>
       <p:graphicFrame>
@@ -4135,6 +4146,17 @@
               <a:t>• 부분수납이 반복되는 고객에게는 분할 수납 조건을 정식으로 승인받아 납기일을 다시 정한다</a:t>
             </a:r>
           </a:p>
+          <a:p>
+            <a:pPr>
+              <a:spcAft>
+                <a:spcPts val="800"/>
+              </a:spcAft>
+              <a:defRPr sz="1500"/>
+            </a:pPr>
+            <a:r>
+              <a:t>• 재무회계팀 과장은 연체 고객과의 통화 내용과 지급 약속일을 상담 기록에 빠짐없이 적어 달라고 요청하였다</a:t>
+            </a:r>
+          </a:p>
         </p:txBody>
       </p:sp>
       <p:graphicFrame>
@@ -4470,6 +4492,17 @@
               <a:t>• 갱신을 원하지 않는 고객에게는 이유를 묻고 그 내용을 상담 기록에 남겨 다음 제안에 반영한다</a:t>
             </a:r>
           </a:p>
+          <a:p>
+            <a:pPr>
+              <a:spcAft>
+                <a:spcPts val="800"/>
+              </a:spcAft>
+              <a:defRPr sz="1500"/>
+            </a:pPr>
+            <a:r>
+              <a:t>• 영업2팀장은 갱신 계약의 승인 일정이 늦어지지 않도록 승인 요청서를 종료일 90일 전에 미리 올리자고 제안하였다</a:t>
+            </a:r>
+          </a:p>
         </p:txBody>
       </p:sp>
       <p:graphicFrame>
@@ -5030,6 +5063,17 @@
             </a:pPr>
             <a:r>
               <a:t>• 클레임 처리 결과는 다음 회의에서 영업팀별로 다시 점검한다</a:t>
+            </a:r>
+          </a:p>
+          <a:p>
+            <a:pPr>
+              <a:spcAft>
+                <a:spcPts val="800"/>
+              </a:spcAft>
+              <a:defRPr sz="1500"/>
+            </a:pPr>
+            <a:r>
+              <a:t>• 고객지원팀은 클레임 접수부터 고객 회신까지 걸린 날수를 매월 집계하여 영업본부장에게 보고하기로 하였다</a:t>
             </a:r>
           </a:p>
         </p:txBody>
